--- a/macjee/MacJee_BU_Potential.pptx
+++ b/macjee/MacJee_BU_Potential.pptx
@@ -4769,7 +4769,7 @@
                 <a:ea typeface="Montserrat" pitchFamily="34" charset="-122"/>
                 <a:cs typeface="Montserrat" pitchFamily="34" charset="-120"/>
               </a:rPr>
-              <a:t>Dagger, 70 mm rocket and fuzes reach US$ 24 mm by 2032. Small in revenue, but they defend the margin as the shell dilutes it.</a:t>
+              <a:t>Dagger, 70 mm rocket and fuzes reach US$ 14 mm by 2032. Small in revenue, but they defend the margin as the shell dilutes it.</a:t>
             </a:r>
             <a:endParaRPr lang="en-US" sz="850" dirty="0"/>
           </a:p>
@@ -5278,7 +5278,7 @@
                 <a:ea typeface="Montserrat" pitchFamily="34" charset="-122"/>
                 <a:cs typeface="Montserrat" pitchFamily="34" charset="-120"/>
               </a:rPr>
-              <a:t>16.6x</a:t>
+              <a:t>US$ 550 mm</a:t>
             </a:r>
             <a:endParaRPr lang="en-US" sz="1100" dirty="0"/>
           </a:p>
@@ -5317,7 +5317,7 @@
                 <a:ea typeface="Montserrat" pitchFamily="34" charset="-122"/>
                 <a:cs typeface="Montserrat" pitchFamily="34" charset="-120"/>
               </a:rPr>
-              <a:t>Gross profit vs BU capex</a:t>
+              <a:t>Gross profit 2027–32</a:t>
             </a:r>
             <a:endParaRPr lang="en-US" sz="800" dirty="0"/>
           </a:p>
@@ -7167,7 +7167,7 @@
                 <a:ea typeface="Montserrat" pitchFamily="34" charset="-122"/>
                 <a:cs typeface="Montserrat" pitchFamily="34" charset="-120"/>
               </a:rPr>
-              <a:t>Azerbaijan ends 2027, Malaysia 2028, ICOR 2029, UAE 2030, Canada 2031 — 91% of 2027 revenue, and zero by 2032.</a:t>
+              <a:t>Azerbaijan ends 2027, ICOR and Malaysia 2029, UAE 2030, Canada 2031 — 100% of 2027 revenue, and zero by 2032.</a:t>
             </a:r>
             <a:endParaRPr lang="en-US" sz="850" dirty="0"/>
           </a:p>
@@ -7511,7 +7511,7 @@
                 <a:ea typeface="Montserrat" pitchFamily="34" charset="-122"/>
                 <a:cs typeface="Montserrat" pitchFamily="34" charset="-120"/>
               </a:rPr>
-              <a:t>91%</a:t>
+              <a:t>100%</a:t>
             </a:r>
             <a:endParaRPr lang="en-US" sz="1100" dirty="0"/>
           </a:p>
@@ -7550,7 +7550,7 @@
                 <a:ea typeface="Montserrat" pitchFamily="34" charset="-122"/>
                 <a:cs typeface="Montserrat" pitchFamily="34" charset="-120"/>
               </a:rPr>
-              <a:t>2027 from 5 contracts</a:t>
+              <a:t>of 2027 revenue</a:t>
             </a:r>
             <a:endParaRPr lang="en-US" sz="800" dirty="0"/>
           </a:p>
@@ -7785,7 +7785,7 @@
                 <a:ea typeface="Montserrat" pitchFamily="34" charset="-122"/>
                 <a:cs typeface="Montserrat" pitchFamily="34" charset="-120"/>
               </a:rPr>
-              <a:t>US$ 25 mm</a:t>
+              <a:t>US$ 253 mm</a:t>
             </a:r>
             <a:endParaRPr lang="en-US" sz="1100" dirty="0"/>
           </a:p>
@@ -7824,7 +7824,7 @@
                 <a:ea typeface="Montserrat" pitchFamily="34" charset="-122"/>
                 <a:cs typeface="Montserrat" pitchFamily="34" charset="-120"/>
               </a:rPr>
-              <a:t>Lowest growth capex</a:t>
+              <a:t>Gross profit 2026–32</a:t>
             </a:r>
             <a:endParaRPr lang="en-US" sz="800" dirty="0"/>
           </a:p>
@@ -7922,7 +7922,7 @@
                 <a:ea typeface="Montserrat" pitchFamily="34" charset="-122"/>
                 <a:cs typeface="Montserrat" pitchFamily="34" charset="-120"/>
               </a:rPr>
-              <a:t>US$ 35 mm</a:t>
+              <a:t>2029</a:t>
             </a:r>
             <a:endParaRPr lang="en-US" sz="1100" dirty="0"/>
           </a:p>
@@ -7961,7 +7961,7 @@
                 <a:ea typeface="Montserrat" pitchFamily="34" charset="-122"/>
                 <a:cs typeface="Montserrat" pitchFamily="34" charset="-120"/>
               </a:rPr>
-              <a:t>new contracts booked</a:t>
+              <a:t>Peak, then run-off</a:t>
             </a:r>
             <a:endParaRPr lang="en-US" sz="800" dirty="0"/>
           </a:p>
@@ -8224,7 +8224,7 @@
                 <a:ea typeface="Montserrat" pitchFamily="34" charset="-122"/>
                 <a:cs typeface="Montserrat" pitchFamily="34" charset="-120"/>
               </a:rPr>
-              <a:t>150</a:t>
+              <a:t>25</a:t>
             </a:r>
             <a:pPr algn="ctr" indent="0" marL="0">
               <a:buNone/>
@@ -8277,7 +8277,7 @@
                 <a:ea typeface="Montserrat" pitchFamily="34" charset="-122"/>
                 <a:cs typeface="Montserrat" pitchFamily="34" charset="-120"/>
               </a:rPr>
-              <a:t>Peak year, 2029E</a:t>
+              <a:t>2027 growth capex</a:t>
             </a:r>
             <a:endParaRPr lang="en-US" sz="804" dirty="0"/>
           </a:p>
@@ -9934,7 +9934,7 @@
                 <a:ea typeface="Montserrat" pitchFamily="34" charset="-122"/>
                 <a:cs typeface="Montserrat" pitchFamily="34" charset="-120"/>
               </a:rPr>
-              <a:t>78% of the group’s US$ 268 mm total, committed in one year. Gross profit repays it 4.6x by 2032 — against 16.6x for Munitions on a fraction of the cheque.</a:t>
+              <a:t>78% of the group’s US$ 268 mm total, committed in a single year — years before the volume that repays it. Nothing else in the plan is this front-loaded.</a:t>
             </a:r>
             <a:endParaRPr lang="en-US" sz="850" dirty="0"/>
           </a:p>
@@ -10057,7 +10057,7 @@
                 <a:ea typeface="Montserrat" pitchFamily="34" charset="-122"/>
                 <a:cs typeface="Montserrat" pitchFamily="34" charset="-120"/>
               </a:rPr>
-              <a:t>49% in 2028 to 52% in 2032, while Munitions dilutes from 41% to 35%. Mix, not price.</a:t>
+              <a:t>49% in 2028 to 52% in 2032 — the only unit whose margin expands across the plan. Mix, not price: missile programmes run near 50% gross margin.</a:t>
             </a:r>
             <a:endParaRPr lang="en-US" sz="850" dirty="0"/>
           </a:p>
